--- a/.cursor/skills/exec-deck-builder/assets/example_deck.pptx
+++ b/.cursor/skills/exec-deck-builder/assets/example_deck.pptx
@@ -462,14 +462,50 @@
               </c:strCache>
             </c:strRef>
           </c:tx>
-          <c:spPr>
-            <a:solidFill>
-              <a:srgbClr val="C93B33"/>
-            </a:solidFill>
-            <a:ln>
-              <a:noFill/>
-            </a:ln>
-          </c:spPr>
+          <c:dPt>
+            <c:idx val="0"/>
+            <c:spPr>
+              <a:solidFill>
+                <a:srgbClr val="2C4E7A"/>
+              </a:solidFill>
+              <a:ln>
+                <a:noFill/>
+              </a:ln>
+            </c:spPr>
+          </c:dPt>
+          <c:dPt>
+            <c:idx val="1"/>
+            <c:spPr>
+              <a:solidFill>
+                <a:srgbClr val="7E93AD"/>
+              </a:solidFill>
+              <a:ln>
+                <a:noFill/>
+              </a:ln>
+            </c:spPr>
+          </c:dPt>
+          <c:dPt>
+            <c:idx val="2"/>
+            <c:spPr>
+              <a:solidFill>
+                <a:srgbClr val="E5822B"/>
+              </a:solidFill>
+              <a:ln>
+                <a:noFill/>
+              </a:ln>
+            </c:spPr>
+          </c:dPt>
+          <c:dPt>
+            <c:idx val="3"/>
+            <c:spPr>
+              <a:solidFill>
+                <a:srgbClr val="C93B33"/>
+              </a:solidFill>
+              <a:ln>
+                <a:noFill/>
+              </a:ln>
+            </c:spPr>
+          </c:dPt>
           <c:cat>
             <c:strRef>
               <c:f>Sheet1!$A$2:$A$5</c:f>
@@ -9627,8 +9663,8 @@
         </p:nvCxnSpPr>
         <p:spPr>
           <a:xfrm>
-            <a:off x="5023129" y="2136902"/>
-            <a:ext cx="0" cy="2790317"/>
+            <a:off x="5023129" y="3317874"/>
+            <a:ext cx="0" cy="1737360"/>
           </a:xfrm>
           <a:prstGeom prst="line">
             <a:avLst/>
@@ -9663,16 +9699,16 @@
         </p:nvSpPr>
         <p:spPr>
           <a:xfrm>
-            <a:off x="4474489" y="1899158"/>
-            <a:ext cx="1097280" cy="219456"/>
-          </a:xfrm>
-          <a:prstGeom prst="rect">
-            <a:avLst/>
-          </a:prstGeom>
-          <a:noFill/>
-        </p:spPr>
-        <p:txBody>
-          <a:bodyPr wrap="square" lIns="0" rIns="0" tIns="0" bIns="0" anchor="t">
+            <a:off x="4474489" y="3116706"/>
+            <a:ext cx="1097280" cy="237744"/>
+          </a:xfrm>
+          <a:prstGeom prst="rect">
+            <a:avLst/>
+          </a:prstGeom>
+          <a:noFill/>
+        </p:spPr>
+        <p:txBody>
+          <a:bodyPr wrap="square" lIns="0" rIns="0" tIns="0" bIns="0" anchor="b">
             <a:spAutoFit/>
           </a:bodyPr>
           <a:lstStyle/>
@@ -9704,7 +9740,7 @@
         </p:nvSpPr>
         <p:spPr>
           <a:xfrm>
-            <a:off x="566928" y="3244722"/>
+            <a:off x="566928" y="3372738"/>
             <a:ext cx="1875790" cy="256032"/>
           </a:xfrm>
           <a:prstGeom prst="rect">
@@ -9745,7 +9781,7 @@
         </p:nvSpPr>
         <p:spPr>
           <a:xfrm>
-            <a:off x="2589022" y="3281298"/>
+            <a:off x="2589022" y="3409314"/>
             <a:ext cx="2733989" cy="182880"/>
           </a:xfrm>
           <a:prstGeom prst="roundRect">
@@ -9791,7 +9827,7 @@
         </p:nvSpPr>
         <p:spPr>
           <a:xfrm>
-            <a:off x="2589022" y="3281298"/>
+            <a:off x="2589022" y="3409314"/>
             <a:ext cx="2507130" cy="182880"/>
           </a:xfrm>
           <a:prstGeom prst="roundRect">
@@ -9837,7 +9873,7 @@
         </p:nvSpPr>
         <p:spPr>
           <a:xfrm>
-            <a:off x="5432739" y="3244722"/>
+            <a:off x="5432739" y="3372738"/>
             <a:ext cx="713232" cy="256032"/>
           </a:xfrm>
           <a:prstGeom prst="rect">
@@ -9878,7 +9914,7 @@
         </p:nvSpPr>
         <p:spPr>
           <a:xfrm>
-            <a:off x="566928" y="3701923"/>
+            <a:off x="566928" y="3829938"/>
             <a:ext cx="1875790" cy="256032"/>
           </a:xfrm>
           <a:prstGeom prst="rect">
@@ -9919,7 +9955,7 @@
         </p:nvSpPr>
         <p:spPr>
           <a:xfrm>
-            <a:off x="2589022" y="3738499"/>
+            <a:off x="2589022" y="3866514"/>
             <a:ext cx="2733989" cy="182880"/>
           </a:xfrm>
           <a:prstGeom prst="roundRect">
@@ -9965,7 +10001,7 @@
         </p:nvSpPr>
         <p:spPr>
           <a:xfrm>
-            <a:off x="2589022" y="3738499"/>
+            <a:off x="2589022" y="3866514"/>
             <a:ext cx="2458448" cy="182880"/>
           </a:xfrm>
           <a:prstGeom prst="roundRect">
@@ -10011,7 +10047,7 @@
         </p:nvSpPr>
         <p:spPr>
           <a:xfrm>
-            <a:off x="5432739" y="3701923"/>
+            <a:off x="5432739" y="3829938"/>
             <a:ext cx="713232" cy="256032"/>
           </a:xfrm>
           <a:prstGeom prst="rect">
@@ -10052,7 +10088,7 @@
         </p:nvSpPr>
         <p:spPr>
           <a:xfrm>
-            <a:off x="566928" y="4159123"/>
+            <a:off x="566928" y="4287138"/>
             <a:ext cx="1875790" cy="256032"/>
           </a:xfrm>
           <a:prstGeom prst="rect">
@@ -10093,7 +10129,7 @@
         </p:nvSpPr>
         <p:spPr>
           <a:xfrm>
-            <a:off x="2589022" y="4195699"/>
+            <a:off x="2589022" y="4323714"/>
             <a:ext cx="2733989" cy="182880"/>
           </a:xfrm>
           <a:prstGeom prst="roundRect">
@@ -10139,7 +10175,7 @@
         </p:nvSpPr>
         <p:spPr>
           <a:xfrm>
-            <a:off x="2589022" y="4195699"/>
+            <a:off x="2589022" y="4323714"/>
             <a:ext cx="2229642" cy="182880"/>
           </a:xfrm>
           <a:prstGeom prst="roundRect">
@@ -10148,7 +10184,7 @@
             </a:avLst>
           </a:prstGeom>
           <a:solidFill>
-            <a:srgbClr val="E5A32B"/>
+            <a:srgbClr val="E5822B"/>
           </a:solidFill>
           <a:ln>
             <a:noFill/>
@@ -10185,7 +10221,7 @@
         </p:nvSpPr>
         <p:spPr>
           <a:xfrm>
-            <a:off x="5432739" y="4159123"/>
+            <a:off x="5432739" y="4287138"/>
             <a:ext cx="713232" cy="256032"/>
           </a:xfrm>
           <a:prstGeom prst="rect">
@@ -10207,7 +10243,7 @@
             <a:r>
               <a:rPr sz="1400" b="1" i="0">
                 <a:solidFill>
-                  <a:srgbClr val="E5A32B"/>
+                  <a:srgbClr val="EE9A4A"/>
                 </a:solidFill>
                 <a:latin typeface="Arial"/>
                 <a:ea typeface="微软雅黑"/>
@@ -10226,7 +10262,7 @@
         </p:nvSpPr>
         <p:spPr>
           <a:xfrm>
-            <a:off x="566928" y="4616323"/>
+            <a:off x="566928" y="4744338"/>
             <a:ext cx="1875790" cy="256032"/>
           </a:xfrm>
           <a:prstGeom prst="rect">
@@ -10267,7 +10303,7 @@
         </p:nvSpPr>
         <p:spPr>
           <a:xfrm>
-            <a:off x="2589022" y="4652899"/>
+            <a:off x="2589022" y="4780914"/>
             <a:ext cx="2733989" cy="182880"/>
           </a:xfrm>
           <a:prstGeom prst="roundRect">
@@ -10313,7 +10349,7 @@
         </p:nvSpPr>
         <p:spPr>
           <a:xfrm>
-            <a:off x="2589022" y="4652899"/>
+            <a:off x="2589022" y="4780914"/>
             <a:ext cx="2628835" cy="182880"/>
           </a:xfrm>
           <a:prstGeom prst="roundRect">
@@ -10359,7 +10395,7 @@
         </p:nvSpPr>
         <p:spPr>
           <a:xfrm>
-            <a:off x="5432739" y="4616323"/>
+            <a:off x="5432739" y="4744338"/>
             <a:ext cx="713232" cy="256032"/>
           </a:xfrm>
           <a:prstGeom prst="rect">
@@ -11714,7 +11750,7 @@
                       <a:r>
                         <a:rPr sz="1200" b="0">
                           <a:solidFill>
-                            <a:srgbClr val="FF7A6B"/>
+                            <a:srgbClr val="FF8F82"/>
                           </a:solidFill>
                           <a:latin typeface="Arial"/>
                           <a:ea typeface="微软雅黑"/>
@@ -11764,7 +11800,7 @@
                       <a:r>
                         <a:rPr sz="1200" b="0">
                           <a:solidFill>
-                            <a:srgbClr val="FF7A6B"/>
+                            <a:srgbClr val="FF8F82"/>
                           </a:solidFill>
                           <a:latin typeface="Arial"/>
                           <a:ea typeface="微软雅黑"/>
@@ -11916,7 +11952,7 @@
                       <a:r>
                         <a:rPr sz="1200" b="0">
                           <a:solidFill>
-                            <a:srgbClr val="E5A32B"/>
+                            <a:srgbClr val="EE9A4A"/>
                           </a:solidFill>
                           <a:latin typeface="Arial"/>
                           <a:ea typeface="微软雅黑"/>
@@ -12211,7 +12247,7 @@
             <a:avLst/>
           </a:prstGeom>
           <a:solidFill>
-            <a:srgbClr val="E5A32B"/>
+            <a:srgbClr val="E5822B"/>
           </a:solidFill>
           <a:ln>
             <a:noFill/>

--- a/.cursor/skills/exec-deck-builder/assets/example_deck.pptx
+++ b/.cursor/skills/exec-deck-builder/assets/example_deck.pptx
@@ -9663,8 +9663,8 @@
         </p:nvCxnSpPr>
         <p:spPr>
           <a:xfrm>
-            <a:off x="5023129" y="3317874"/>
-            <a:ext cx="0" cy="1737360"/>
+            <a:off x="5023129" y="3391026"/>
+            <a:ext cx="0" cy="1664208"/>
           </a:xfrm>
           <a:prstGeom prst="line">
             <a:avLst/>
@@ -9699,8 +9699,8 @@
         </p:nvSpPr>
         <p:spPr>
           <a:xfrm>
-            <a:off x="4474489" y="3116706"/>
-            <a:ext cx="1097280" cy="237744"/>
+            <a:off x="4383049" y="3153282"/>
+            <a:ext cx="1280160" cy="219456"/>
           </a:xfrm>
           <a:prstGeom prst="rect">
             <a:avLst/>
@@ -10184,7 +10184,7 @@
             </a:avLst>
           </a:prstGeom>
           <a:solidFill>
-            <a:srgbClr val="E5822B"/>
+            <a:srgbClr val="C93B33"/>
           </a:solidFill>
           <a:ln>
             <a:noFill/>
@@ -10243,7 +10243,7 @@
             <a:r>
               <a:rPr sz="1400" b="1" i="0">
                 <a:solidFill>
-                  <a:srgbClr val="EE9A4A"/>
+                  <a:srgbClr val="FF8A85"/>
                 </a:solidFill>
                 <a:latin typeface="Arial"/>
                 <a:ea typeface="微软雅黑"/>
@@ -11750,7 +11750,7 @@
                       <a:r>
                         <a:rPr sz="1200" b="0">
                           <a:solidFill>
-                            <a:srgbClr val="FF8F82"/>
+                            <a:srgbClr val="FF8A85"/>
                           </a:solidFill>
                           <a:latin typeface="Arial"/>
                           <a:ea typeface="微软雅黑"/>
@@ -11800,7 +11800,7 @@
                       <a:r>
                         <a:rPr sz="1200" b="0">
                           <a:solidFill>
-                            <a:srgbClr val="FF8F82"/>
+                            <a:srgbClr val="FF8A85"/>
                           </a:solidFill>
                           <a:latin typeface="Arial"/>
                           <a:ea typeface="微软雅黑"/>

--- a/.cursor/skills/exec-deck-builder/assets/example_deck.pptx
+++ b/.cursor/skills/exec-deck-builder/assets/example_deck.pptx
@@ -4195,7 +4195,7 @@
         </p:nvSpPr>
         <p:spPr>
           <a:xfrm>
-            <a:off x="786384" y="1673352"/>
+            <a:off x="786384" y="1671157"/>
             <a:ext cx="10619201" cy="274320"/>
           </a:xfrm>
           <a:prstGeom prst="rect">
@@ -4236,7 +4236,7 @@
         </p:nvSpPr>
         <p:spPr>
           <a:xfrm>
-            <a:off x="786384" y="2057400"/>
+            <a:off x="786384" y="2055205"/>
             <a:ext cx="82296" cy="566928"/>
           </a:xfrm>
           <a:prstGeom prst="rect">
@@ -4280,7 +4280,7 @@
         </p:nvSpPr>
         <p:spPr>
           <a:xfrm>
-            <a:off x="1060704" y="2057400"/>
+            <a:off x="1060704" y="2055205"/>
             <a:ext cx="10344881" cy="589279"/>
           </a:xfrm>
           <a:prstGeom prst="rect">
@@ -4321,7 +4321,7 @@
         </p:nvSpPr>
         <p:spPr>
           <a:xfrm>
-            <a:off x="1060704" y="2847848"/>
+            <a:off x="1060704" y="2845653"/>
             <a:ext cx="8495361" cy="297180"/>
           </a:xfrm>
           <a:prstGeom prst="rect">
@@ -4547,7 +4547,7 @@
         <p:spPr>
           <a:xfrm>
             <a:off x="877824" y="1368806"/>
-            <a:ext cx="5291312" cy="1052342"/>
+            <a:ext cx="5291312" cy="990894"/>
           </a:xfrm>
           <a:prstGeom prst="roundRect">
             <a:avLst>
@@ -4804,7 +4804,7 @@
         <p:spPr>
           <a:xfrm>
             <a:off x="6333728" y="1368806"/>
-            <a:ext cx="5291312" cy="1052342"/>
+            <a:ext cx="5291312" cy="990894"/>
           </a:xfrm>
           <a:prstGeom prst="roundRect">
             <a:avLst>
@@ -5060,8 +5060,8 @@
         </p:nvSpPr>
         <p:spPr>
           <a:xfrm>
-            <a:off x="877824" y="2585740"/>
-            <a:ext cx="5291312" cy="1052342"/>
+            <a:off x="877824" y="2524292"/>
+            <a:ext cx="5291312" cy="990894"/>
           </a:xfrm>
           <a:prstGeom prst="roundRect">
             <a:avLst>
@@ -5106,7 +5106,7 @@
         </p:nvSpPr>
         <p:spPr>
           <a:xfrm>
-            <a:off x="1042415" y="2713756"/>
+            <a:off x="1042415" y="2652308"/>
             <a:ext cx="4962128" cy="256032"/>
           </a:xfrm>
           <a:prstGeom prst="rect">
@@ -5147,7 +5147,7 @@
         </p:nvSpPr>
         <p:spPr>
           <a:xfrm>
-            <a:off x="1042415" y="3097804"/>
+            <a:off x="1042415" y="3036356"/>
             <a:ext cx="51816" cy="51816"/>
           </a:xfrm>
           <a:prstGeom prst="ellipse">
@@ -5191,7 +5191,7 @@
         </p:nvSpPr>
         <p:spPr>
           <a:xfrm>
-            <a:off x="1222247" y="3024652"/>
+            <a:off x="1222247" y="2963204"/>
             <a:ext cx="4782296" cy="198120"/>
           </a:xfrm>
           <a:prstGeom prst="rect">
@@ -5232,7 +5232,7 @@
         </p:nvSpPr>
         <p:spPr>
           <a:xfrm>
-            <a:off x="1042415" y="3387364"/>
+            <a:off x="1042415" y="3325916"/>
             <a:ext cx="51816" cy="51816"/>
           </a:xfrm>
           <a:prstGeom prst="ellipse">
@@ -5276,7 +5276,7 @@
         </p:nvSpPr>
         <p:spPr>
           <a:xfrm>
-            <a:off x="1222247" y="3314212"/>
+            <a:off x="1222247" y="3252764"/>
             <a:ext cx="4782296" cy="198120"/>
           </a:xfrm>
           <a:prstGeom prst="rect">
@@ -5317,8 +5317,8 @@
         </p:nvSpPr>
         <p:spPr>
           <a:xfrm>
-            <a:off x="6333728" y="2585740"/>
-            <a:ext cx="5291312" cy="1052342"/>
+            <a:off x="6333728" y="2524292"/>
+            <a:ext cx="5291312" cy="990894"/>
           </a:xfrm>
           <a:prstGeom prst="roundRect">
             <a:avLst>
@@ -5363,7 +5363,7 @@
         </p:nvSpPr>
         <p:spPr>
           <a:xfrm>
-            <a:off x="6498320" y="2713756"/>
+            <a:off x="6498320" y="2652308"/>
             <a:ext cx="4962128" cy="256032"/>
           </a:xfrm>
           <a:prstGeom prst="rect">
@@ -5404,7 +5404,7 @@
         </p:nvSpPr>
         <p:spPr>
           <a:xfrm>
-            <a:off x="6498320" y="3097804"/>
+            <a:off x="6498320" y="3036356"/>
             <a:ext cx="51816" cy="51816"/>
           </a:xfrm>
           <a:prstGeom prst="ellipse">
@@ -5448,7 +5448,7 @@
         </p:nvSpPr>
         <p:spPr>
           <a:xfrm>
-            <a:off x="6678152" y="3024652"/>
+            <a:off x="6678152" y="2963204"/>
             <a:ext cx="4782296" cy="198120"/>
           </a:xfrm>
           <a:prstGeom prst="rect">
@@ -5489,7 +5489,7 @@
         </p:nvSpPr>
         <p:spPr>
           <a:xfrm>
-            <a:off x="6498320" y="3387364"/>
+            <a:off x="6498320" y="3325916"/>
             <a:ext cx="51816" cy="51816"/>
           </a:xfrm>
           <a:prstGeom prst="ellipse">
@@ -5533,7 +5533,7 @@
         </p:nvSpPr>
         <p:spPr>
           <a:xfrm>
-            <a:off x="6678152" y="3314212"/>
+            <a:off x="6678152" y="3252764"/>
             <a:ext cx="4782296" cy="198120"/>
           </a:xfrm>
           <a:prstGeom prst="rect">
@@ -5574,7 +5574,7 @@
         </p:nvSpPr>
         <p:spPr>
           <a:xfrm>
-            <a:off x="877824" y="3692946"/>
+            <a:off x="877824" y="3570051"/>
             <a:ext cx="10747217" cy="219456"/>
           </a:xfrm>
           <a:prstGeom prst="rect">
@@ -5615,7 +5615,7 @@
         </p:nvSpPr>
         <p:spPr>
           <a:xfrm>
-            <a:off x="877824" y="3692946"/>
+            <a:off x="877824" y="3570051"/>
             <a:ext cx="10747217" cy="219456"/>
           </a:xfrm>
           <a:prstGeom prst="rect">
@@ -5657,7 +5657,7 @@
         <p:spPr>
           <a:xfrm>
             <a:off x="566927" y="1368806"/>
-            <a:ext cx="237744" cy="2269276"/>
+            <a:ext cx="237744" cy="2146381"/>
           </a:xfrm>
           <a:prstGeom prst="rect">
             <a:avLst/>
@@ -5698,7 +5698,7 @@
         <p:spPr>
           <a:xfrm>
             <a:off x="566927" y="1368806"/>
-            <a:ext cx="237744" cy="2269276"/>
+            <a:ext cx="237744" cy="2146381"/>
           </a:xfrm>
           <a:prstGeom prst="rect">
             <a:avLst/>
@@ -5738,7 +5738,7 @@
         </p:nvCxnSpPr>
         <p:spPr>
           <a:xfrm>
-            <a:off x="658368" y="5013856"/>
+            <a:off x="658368" y="4850405"/>
             <a:ext cx="10875233" cy="0"/>
           </a:xfrm>
           <a:prstGeom prst="line">
@@ -5773,7 +5773,7 @@
         </p:nvSpPr>
         <p:spPr>
           <a:xfrm>
-            <a:off x="1581299" y="4922416"/>
+            <a:off x="1581299" y="4758965"/>
             <a:ext cx="182880" cy="182880"/>
           </a:xfrm>
           <a:prstGeom prst="ellipse">
@@ -5817,8 +5817,8 @@
         </p:nvSpPr>
         <p:spPr>
           <a:xfrm>
-            <a:off x="621792" y="4168434"/>
-            <a:ext cx="2101894" cy="699117"/>
+            <a:off x="621792" y="4045539"/>
+            <a:ext cx="2101894" cy="658562"/>
           </a:xfrm>
           <a:prstGeom prst="rect">
             <a:avLst/>
@@ -5858,7 +5858,7 @@
         </p:nvSpPr>
         <p:spPr>
           <a:xfrm>
-            <a:off x="621792" y="5196736"/>
+            <a:off x="621792" y="5033285"/>
             <a:ext cx="2101894" cy="220472"/>
           </a:xfrm>
           <a:prstGeom prst="rect">
@@ -5899,8 +5899,8 @@
         </p:nvSpPr>
         <p:spPr>
           <a:xfrm>
-            <a:off x="621792" y="5462928"/>
-            <a:ext cx="2101894" cy="718415"/>
+            <a:off x="621792" y="5299477"/>
+            <a:ext cx="2101894" cy="662410"/>
           </a:xfrm>
           <a:prstGeom prst="rect">
             <a:avLst/>
@@ -5940,7 +5940,7 @@
         </p:nvSpPr>
         <p:spPr>
           <a:xfrm>
-            <a:off x="3792922" y="4922416"/>
+            <a:off x="3792922" y="4758965"/>
             <a:ext cx="182880" cy="182880"/>
           </a:xfrm>
           <a:prstGeom prst="ellipse">
@@ -5984,8 +5984,8 @@
         </p:nvSpPr>
         <p:spPr>
           <a:xfrm>
-            <a:off x="2833414" y="4168434"/>
-            <a:ext cx="2101894" cy="699117"/>
+            <a:off x="2833414" y="4045539"/>
+            <a:ext cx="2101894" cy="658562"/>
           </a:xfrm>
           <a:prstGeom prst="rect">
             <a:avLst/>
@@ -6025,7 +6025,7 @@
         </p:nvSpPr>
         <p:spPr>
           <a:xfrm>
-            <a:off x="2833414" y="5196736"/>
+            <a:off x="2833414" y="5033285"/>
             <a:ext cx="2101894" cy="220472"/>
           </a:xfrm>
           <a:prstGeom prst="rect">
@@ -6066,8 +6066,8 @@
         </p:nvSpPr>
         <p:spPr>
           <a:xfrm>
-            <a:off x="2833414" y="5462928"/>
-            <a:ext cx="2101894" cy="718415"/>
+            <a:off x="2833414" y="5299477"/>
+            <a:ext cx="2101894" cy="662410"/>
           </a:xfrm>
           <a:prstGeom prst="rect">
             <a:avLst/>
@@ -6107,7 +6107,7 @@
         </p:nvSpPr>
         <p:spPr>
           <a:xfrm>
-            <a:off x="6004544" y="4922416"/>
+            <a:off x="6004544" y="4758965"/>
             <a:ext cx="182880" cy="182880"/>
           </a:xfrm>
           <a:prstGeom prst="ellipse">
@@ -6151,8 +6151,8 @@
         </p:nvSpPr>
         <p:spPr>
           <a:xfrm>
-            <a:off x="5045037" y="4168434"/>
-            <a:ext cx="2101894" cy="699117"/>
+            <a:off x="5045037" y="4045539"/>
+            <a:ext cx="2101894" cy="658562"/>
           </a:xfrm>
           <a:prstGeom prst="rect">
             <a:avLst/>
@@ -6192,7 +6192,7 @@
         </p:nvSpPr>
         <p:spPr>
           <a:xfrm>
-            <a:off x="5045037" y="5196736"/>
+            <a:off x="5045037" y="5033285"/>
             <a:ext cx="2101894" cy="220472"/>
           </a:xfrm>
           <a:prstGeom prst="rect">
@@ -6233,8 +6233,8 @@
         </p:nvSpPr>
         <p:spPr>
           <a:xfrm>
-            <a:off x="5045037" y="5462928"/>
-            <a:ext cx="2101894" cy="718415"/>
+            <a:off x="5045037" y="5299477"/>
+            <a:ext cx="2101894" cy="662410"/>
           </a:xfrm>
           <a:prstGeom prst="rect">
             <a:avLst/>
@@ -6274,7 +6274,7 @@
         </p:nvSpPr>
         <p:spPr>
           <a:xfrm>
-            <a:off x="8216167" y="4922416"/>
+            <a:off x="8216167" y="4758965"/>
             <a:ext cx="182880" cy="182880"/>
           </a:xfrm>
           <a:prstGeom prst="ellipse">
@@ -6318,8 +6318,8 @@
         </p:nvSpPr>
         <p:spPr>
           <a:xfrm>
-            <a:off x="7256660" y="4168434"/>
-            <a:ext cx="2101894" cy="699117"/>
+            <a:off x="7256660" y="4045539"/>
+            <a:ext cx="2101894" cy="658562"/>
           </a:xfrm>
           <a:prstGeom prst="rect">
             <a:avLst/>
@@ -6359,7 +6359,7 @@
         </p:nvSpPr>
         <p:spPr>
           <a:xfrm>
-            <a:off x="7256660" y="5196736"/>
+            <a:off x="7256660" y="5033285"/>
             <a:ext cx="2101894" cy="220472"/>
           </a:xfrm>
           <a:prstGeom prst="rect">
@@ -6400,8 +6400,8 @@
         </p:nvSpPr>
         <p:spPr>
           <a:xfrm>
-            <a:off x="7256660" y="5462928"/>
-            <a:ext cx="2101894" cy="718415"/>
+            <a:off x="7256660" y="5299477"/>
+            <a:ext cx="2101894" cy="662410"/>
           </a:xfrm>
           <a:prstGeom prst="rect">
             <a:avLst/>
@@ -6441,7 +6441,7 @@
         </p:nvSpPr>
         <p:spPr>
           <a:xfrm>
-            <a:off x="10427790" y="4922416"/>
+            <a:off x="10427790" y="4758965"/>
             <a:ext cx="182880" cy="182880"/>
           </a:xfrm>
           <a:prstGeom prst="ellipse">
@@ -6485,8 +6485,8 @@
         </p:nvSpPr>
         <p:spPr>
           <a:xfrm>
-            <a:off x="9468282" y="4168434"/>
-            <a:ext cx="2101894" cy="699117"/>
+            <a:off x="9468282" y="4045539"/>
+            <a:ext cx="2101894" cy="658562"/>
           </a:xfrm>
           <a:prstGeom prst="rect">
             <a:avLst/>
@@ -6526,7 +6526,7 @@
         </p:nvSpPr>
         <p:spPr>
           <a:xfrm>
-            <a:off x="9468282" y="5196736"/>
+            <a:off x="9468282" y="5033285"/>
             <a:ext cx="2101894" cy="220472"/>
           </a:xfrm>
           <a:prstGeom prst="rect">
@@ -6567,8 +6567,8 @@
         </p:nvSpPr>
         <p:spPr>
           <a:xfrm>
-            <a:off x="9468282" y="5462928"/>
-            <a:ext cx="2101894" cy="718415"/>
+            <a:off x="9468282" y="5299477"/>
+            <a:ext cx="2101894" cy="662410"/>
           </a:xfrm>
           <a:prstGeom prst="rect">
             <a:avLst/>
@@ -6608,7 +6608,7 @@
         </p:nvSpPr>
         <p:spPr>
           <a:xfrm>
-            <a:off x="566928" y="6327648"/>
+            <a:off x="566928" y="6089904"/>
             <a:ext cx="11058113" cy="219456"/>
           </a:xfrm>
           <a:prstGeom prst="rect">
@@ -6649,7 +6649,7 @@
         </p:nvSpPr>
         <p:spPr>
           <a:xfrm>
-            <a:off x="10710641" y="6327648"/>
+            <a:off x="10710641" y="6089904"/>
             <a:ext cx="914400" cy="219456"/>
           </a:xfrm>
           <a:prstGeom prst="rect">
@@ -6716,7 +6716,7 @@
         </p:nvSpPr>
         <p:spPr>
           <a:xfrm>
-            <a:off x="786384" y="1783080"/>
+            <a:off x="786384" y="1139342"/>
             <a:ext cx="82296" cy="512064"/>
           </a:xfrm>
           <a:prstGeom prst="rect">
@@ -6760,7 +6760,7 @@
         </p:nvSpPr>
         <p:spPr>
           <a:xfrm>
-            <a:off x="1060704" y="1783080"/>
+            <a:off x="1060704" y="1139342"/>
             <a:ext cx="10344881" cy="566928"/>
           </a:xfrm>
           <a:prstGeom prst="rect">
@@ -6801,7 +6801,7 @@
         </p:nvSpPr>
         <p:spPr>
           <a:xfrm>
-            <a:off x="1060704" y="2569464"/>
+            <a:off x="1060704" y="1925726"/>
             <a:ext cx="347472" cy="264160"/>
           </a:xfrm>
           <a:prstGeom prst="rect">
@@ -6842,7 +6842,7 @@
         </p:nvSpPr>
         <p:spPr>
           <a:xfrm>
-            <a:off x="1481328" y="2569464"/>
+            <a:off x="1481328" y="1925726"/>
             <a:ext cx="9924257" cy="264160"/>
           </a:xfrm>
           <a:prstGeom prst="rect">
@@ -6883,7 +6883,7 @@
         </p:nvSpPr>
         <p:spPr>
           <a:xfrm>
-            <a:off x="1060704" y="3034792"/>
+            <a:off x="1060704" y="2391054"/>
             <a:ext cx="347472" cy="264160"/>
           </a:xfrm>
           <a:prstGeom prst="rect">
@@ -6924,7 +6924,7 @@
         </p:nvSpPr>
         <p:spPr>
           <a:xfrm>
-            <a:off x="1481328" y="3034792"/>
+            <a:off x="1481328" y="2391054"/>
             <a:ext cx="9924257" cy="264160"/>
           </a:xfrm>
           <a:prstGeom prst="rect">
@@ -6965,7 +6965,7 @@
         </p:nvSpPr>
         <p:spPr>
           <a:xfrm>
-            <a:off x="1060704" y="3500120"/>
+            <a:off x="1060704" y="2856382"/>
             <a:ext cx="347472" cy="264160"/>
           </a:xfrm>
           <a:prstGeom prst="rect">
@@ -7006,7 +7006,7 @@
         </p:nvSpPr>
         <p:spPr>
           <a:xfrm>
-            <a:off x="1481328" y="3500120"/>
+            <a:off x="1481328" y="2856382"/>
             <a:ext cx="9924257" cy="264160"/>
           </a:xfrm>
           <a:prstGeom prst="rect">
@@ -7088,7 +7088,7 @@
         </p:nvSpPr>
         <p:spPr>
           <a:xfrm>
-            <a:off x="10710641" y="6327648"/>
+            <a:off x="10710641" y="6089904"/>
             <a:ext cx="914400" cy="219456"/>
           </a:xfrm>
           <a:prstGeom prst="rect">
@@ -8001,7 +8001,7 @@
         </p:nvSpPr>
         <p:spPr>
           <a:xfrm>
-            <a:off x="566928" y="3619459"/>
+            <a:off x="566928" y="3522898"/>
             <a:ext cx="5607572" cy="237744"/>
           </a:xfrm>
           <a:prstGeom prst="rect">
@@ -8042,7 +8042,7 @@
         </p:nvSpPr>
         <p:spPr>
           <a:xfrm>
-            <a:off x="566928" y="4015699"/>
+            <a:off x="566928" y="3919138"/>
             <a:ext cx="60452" cy="60452"/>
           </a:xfrm>
           <a:prstGeom prst="ellipse">
@@ -8086,7 +8086,7 @@
         </p:nvSpPr>
         <p:spPr>
           <a:xfrm>
-            <a:off x="755396" y="3930355"/>
+            <a:off x="755396" y="3833794"/>
             <a:ext cx="5419104" cy="231140"/>
           </a:xfrm>
           <a:prstGeom prst="rect">
@@ -8127,7 +8127,7 @@
         </p:nvSpPr>
         <p:spPr>
           <a:xfrm>
-            <a:off x="755396" y="4198071"/>
+            <a:off x="755396" y="4101510"/>
             <a:ext cx="5419104" cy="219191"/>
           </a:xfrm>
           <a:prstGeom prst="rect">
@@ -8168,7 +8168,7 @@
         </p:nvSpPr>
         <p:spPr>
           <a:xfrm>
-            <a:off x="566928" y="4630623"/>
+            <a:off x="566928" y="4534062"/>
             <a:ext cx="60452" cy="60452"/>
           </a:xfrm>
           <a:prstGeom prst="ellipse">
@@ -8212,7 +8212,7 @@
         </p:nvSpPr>
         <p:spPr>
           <a:xfrm>
-            <a:off x="755396" y="4545279"/>
+            <a:off x="755396" y="4448718"/>
             <a:ext cx="5419104" cy="231140"/>
           </a:xfrm>
           <a:prstGeom prst="rect">
@@ -8253,7 +8253,7 @@
         </p:nvSpPr>
         <p:spPr>
           <a:xfrm>
-            <a:off x="755396" y="4812995"/>
+            <a:off x="755396" y="4716434"/>
             <a:ext cx="5419104" cy="219191"/>
           </a:xfrm>
           <a:prstGeom prst="rect">
@@ -8294,7 +8294,7 @@
         </p:nvSpPr>
         <p:spPr>
           <a:xfrm>
-            <a:off x="566928" y="5245547"/>
+            <a:off x="566928" y="5148986"/>
             <a:ext cx="60452" cy="60452"/>
           </a:xfrm>
           <a:prstGeom prst="ellipse">
@@ -8338,7 +8338,7 @@
         </p:nvSpPr>
         <p:spPr>
           <a:xfrm>
-            <a:off x="755396" y="5160203"/>
+            <a:off x="755396" y="5063642"/>
             <a:ext cx="5419104" cy="231140"/>
           </a:xfrm>
           <a:prstGeom prst="rect">
@@ -8379,7 +8379,7 @@
         </p:nvSpPr>
         <p:spPr>
           <a:xfrm>
-            <a:off x="755396" y="5427919"/>
+            <a:off x="755396" y="5331358"/>
             <a:ext cx="5419104" cy="219191"/>
           </a:xfrm>
           <a:prstGeom prst="rect">
@@ -8420,7 +8420,7 @@
         </p:nvSpPr>
         <p:spPr>
           <a:xfrm>
-            <a:off x="6448820" y="3619459"/>
+            <a:off x="6448820" y="3522898"/>
             <a:ext cx="5176220" cy="237744"/>
           </a:xfrm>
           <a:prstGeom prst="rect">
@@ -8461,7 +8461,7 @@
         </p:nvSpPr>
         <p:spPr>
           <a:xfrm>
-            <a:off x="6448820" y="3930355"/>
+            <a:off x="6448820" y="3833794"/>
             <a:ext cx="347472" cy="231140"/>
           </a:xfrm>
           <a:prstGeom prst="rect">
@@ -8502,7 +8502,7 @@
         </p:nvSpPr>
         <p:spPr>
           <a:xfrm>
-            <a:off x="6869444" y="3930355"/>
+            <a:off x="6869444" y="3833794"/>
             <a:ext cx="4755596" cy="231140"/>
           </a:xfrm>
           <a:prstGeom prst="rect">
@@ -8543,7 +8543,7 @@
         </p:nvSpPr>
         <p:spPr>
           <a:xfrm>
-            <a:off x="6448820" y="4326087"/>
+            <a:off x="6448820" y="4229526"/>
             <a:ext cx="347472" cy="231140"/>
           </a:xfrm>
           <a:prstGeom prst="rect">
@@ -8584,7 +8584,7 @@
         </p:nvSpPr>
         <p:spPr>
           <a:xfrm>
-            <a:off x="6869444" y="4326087"/>
+            <a:off x="6869444" y="4229526"/>
             <a:ext cx="4755596" cy="231140"/>
           </a:xfrm>
           <a:prstGeom prst="rect">
@@ -8625,7 +8625,7 @@
         </p:nvSpPr>
         <p:spPr>
           <a:xfrm>
-            <a:off x="6448820" y="4721819"/>
+            <a:off x="6448820" y="4625258"/>
             <a:ext cx="347472" cy="231140"/>
           </a:xfrm>
           <a:prstGeom prst="rect">
@@ -8666,7 +8666,7 @@
         </p:nvSpPr>
         <p:spPr>
           <a:xfrm>
-            <a:off x="6869444" y="4721819"/>
+            <a:off x="6869444" y="4625258"/>
             <a:ext cx="4755596" cy="231140"/>
           </a:xfrm>
           <a:prstGeom prst="rect">
@@ -8707,7 +8707,7 @@
         </p:nvSpPr>
         <p:spPr>
           <a:xfrm>
-            <a:off x="566928" y="6327648"/>
+            <a:off x="566928" y="6089904"/>
             <a:ext cx="11058113" cy="219456"/>
           </a:xfrm>
           <a:prstGeom prst="rect">
@@ -8748,7 +8748,7 @@
         </p:nvSpPr>
         <p:spPr>
           <a:xfrm>
-            <a:off x="10710641" y="6327648"/>
+            <a:off x="10710641" y="6089904"/>
             <a:ext cx="914400" cy="219456"/>
           </a:xfrm>
           <a:prstGeom prst="rect">
@@ -8815,7 +8815,7 @@
         </p:nvSpPr>
         <p:spPr>
           <a:xfrm>
-            <a:off x="786384" y="1910333"/>
+            <a:off x="786384" y="1543110"/>
             <a:ext cx="2194560" cy="842010"/>
           </a:xfrm>
           <a:prstGeom prst="rect">
@@ -8856,7 +8856,7 @@
         </p:nvSpPr>
         <p:spPr>
           <a:xfrm>
-            <a:off x="786384" y="2880360"/>
+            <a:off x="786384" y="2513136"/>
             <a:ext cx="10619201" cy="509523"/>
           </a:xfrm>
           <a:prstGeom prst="rect">
@@ -8897,7 +8897,7 @@
         </p:nvSpPr>
         <p:spPr>
           <a:xfrm>
-            <a:off x="786384" y="3554476"/>
+            <a:off x="786384" y="3187252"/>
             <a:ext cx="8282977" cy="548640"/>
           </a:xfrm>
           <a:prstGeom prst="rect">
@@ -9102,7 +9102,7 @@
         </p:nvSpPr>
         <p:spPr>
           <a:xfrm>
-            <a:off x="10710641" y="6327648"/>
+            <a:off x="10710641" y="6089904"/>
             <a:ext cx="914400" cy="219456"/>
           </a:xfrm>
           <a:prstGeom prst="rect">
@@ -9253,7 +9253,7 @@
         </p:nvGraphicFramePr>
         <p:xfrm>
           <a:off x="566928" y="1368806"/>
-          <a:ext cx="11058113" cy="3639662"/>
+          <a:ext cx="11058113" cy="3468486"/>
         </p:xfrm>
         <a:graphic>
           <a:graphicData uri="http://schemas.openxmlformats.org/drawingml/2006/chart">
@@ -9269,8 +9269,8 @@
         </p:nvSpPr>
         <p:spPr>
           <a:xfrm>
-            <a:off x="566928" y="5154772"/>
-            <a:ext cx="11058113" cy="1026571"/>
+            <a:off x="566928" y="4983596"/>
+            <a:ext cx="11058113" cy="978291"/>
           </a:xfrm>
           <a:prstGeom prst="roundRect">
             <a:avLst>
@@ -9315,8 +9315,8 @@
         </p:nvSpPr>
         <p:spPr>
           <a:xfrm>
-            <a:off x="786384" y="5301076"/>
-            <a:ext cx="664463" cy="733963"/>
+            <a:off x="786384" y="5129900"/>
+            <a:ext cx="664463" cy="685683"/>
           </a:xfrm>
           <a:prstGeom prst="rect">
             <a:avLst/>
@@ -9356,8 +9356,8 @@
         </p:nvCxnSpPr>
         <p:spPr>
           <a:xfrm>
-            <a:off x="1533143" y="5355940"/>
-            <a:ext cx="0" cy="624236"/>
+            <a:off x="1533143" y="5184764"/>
+            <a:ext cx="0" cy="575956"/>
           </a:xfrm>
           <a:prstGeom prst="line">
             <a:avLst/>
@@ -9391,8 +9391,8 @@
         </p:nvSpPr>
         <p:spPr>
           <a:xfrm>
-            <a:off x="1615440" y="5301076"/>
-            <a:ext cx="9790145" cy="733963"/>
+            <a:off x="1615440" y="5129900"/>
+            <a:ext cx="9790145" cy="685683"/>
           </a:xfrm>
           <a:prstGeom prst="rect">
             <a:avLst/>
@@ -9432,7 +9432,7 @@
         </p:nvSpPr>
         <p:spPr>
           <a:xfrm>
-            <a:off x="566928" y="6327648"/>
+            <a:off x="566928" y="6089904"/>
             <a:ext cx="11058113" cy="219456"/>
           </a:xfrm>
           <a:prstGeom prst="rect">
@@ -9473,7 +9473,7 @@
         </p:nvSpPr>
         <p:spPr>
           <a:xfrm>
-            <a:off x="10710641" y="6327648"/>
+            <a:off x="10710641" y="6089904"/>
             <a:ext cx="914400" cy="219456"/>
           </a:xfrm>
           <a:prstGeom prst="rect">
@@ -9663,7 +9663,7 @@
         </p:nvCxnSpPr>
         <p:spPr>
           <a:xfrm>
-            <a:off x="5023129" y="3391026"/>
+            <a:off x="5023129" y="3281298"/>
             <a:ext cx="0" cy="1664208"/>
           </a:xfrm>
           <a:prstGeom prst="line">
@@ -9699,7 +9699,7 @@
         </p:nvSpPr>
         <p:spPr>
           <a:xfrm>
-            <a:off x="4383049" y="3153282"/>
+            <a:off x="4383049" y="3043554"/>
             <a:ext cx="1280160" cy="219456"/>
           </a:xfrm>
           <a:prstGeom prst="rect">
@@ -9740,7 +9740,7 @@
         </p:nvSpPr>
         <p:spPr>
           <a:xfrm>
-            <a:off x="566928" y="3372738"/>
+            <a:off x="566928" y="3263010"/>
             <a:ext cx="1875790" cy="256032"/>
           </a:xfrm>
           <a:prstGeom prst="rect">
@@ -9781,7 +9781,7 @@
         </p:nvSpPr>
         <p:spPr>
           <a:xfrm>
-            <a:off x="2589022" y="3409314"/>
+            <a:off x="2589022" y="3299586"/>
             <a:ext cx="2733989" cy="182880"/>
           </a:xfrm>
           <a:prstGeom prst="roundRect">
@@ -9827,7 +9827,7 @@
         </p:nvSpPr>
         <p:spPr>
           <a:xfrm>
-            <a:off x="2589022" y="3409314"/>
+            <a:off x="2589022" y="3299586"/>
             <a:ext cx="2507130" cy="182880"/>
           </a:xfrm>
           <a:prstGeom prst="roundRect">
@@ -9873,7 +9873,7 @@
         </p:nvSpPr>
         <p:spPr>
           <a:xfrm>
-            <a:off x="5432739" y="3372738"/>
+            <a:off x="5432739" y="3263010"/>
             <a:ext cx="713232" cy="256032"/>
           </a:xfrm>
           <a:prstGeom prst="rect">
@@ -9914,7 +9914,7 @@
         </p:nvSpPr>
         <p:spPr>
           <a:xfrm>
-            <a:off x="566928" y="3829938"/>
+            <a:off x="566928" y="3720210"/>
             <a:ext cx="1875790" cy="256032"/>
           </a:xfrm>
           <a:prstGeom prst="rect">
@@ -9955,7 +9955,7 @@
         </p:nvSpPr>
         <p:spPr>
           <a:xfrm>
-            <a:off x="2589022" y="3866514"/>
+            <a:off x="2589022" y="3756786"/>
             <a:ext cx="2733989" cy="182880"/>
           </a:xfrm>
           <a:prstGeom prst="roundRect">
@@ -10001,7 +10001,7 @@
         </p:nvSpPr>
         <p:spPr>
           <a:xfrm>
-            <a:off x="2589022" y="3866514"/>
+            <a:off x="2589022" y="3756786"/>
             <a:ext cx="2458448" cy="182880"/>
           </a:xfrm>
           <a:prstGeom prst="roundRect">
@@ -10047,7 +10047,7 @@
         </p:nvSpPr>
         <p:spPr>
           <a:xfrm>
-            <a:off x="5432739" y="3829938"/>
+            <a:off x="5432739" y="3720210"/>
             <a:ext cx="713232" cy="256032"/>
           </a:xfrm>
           <a:prstGeom prst="rect">
@@ -10088,7 +10088,7 @@
         </p:nvSpPr>
         <p:spPr>
           <a:xfrm>
-            <a:off x="566928" y="4287138"/>
+            <a:off x="566928" y="4177410"/>
             <a:ext cx="1875790" cy="256032"/>
           </a:xfrm>
           <a:prstGeom prst="rect">
@@ -10129,7 +10129,7 @@
         </p:nvSpPr>
         <p:spPr>
           <a:xfrm>
-            <a:off x="2589022" y="4323714"/>
+            <a:off x="2589022" y="4213987"/>
             <a:ext cx="2733989" cy="182880"/>
           </a:xfrm>
           <a:prstGeom prst="roundRect">
@@ -10175,7 +10175,7 @@
         </p:nvSpPr>
         <p:spPr>
           <a:xfrm>
-            <a:off x="2589022" y="4323714"/>
+            <a:off x="2589022" y="4213987"/>
             <a:ext cx="2229642" cy="182880"/>
           </a:xfrm>
           <a:prstGeom prst="roundRect">
@@ -10221,7 +10221,7 @@
         </p:nvSpPr>
         <p:spPr>
           <a:xfrm>
-            <a:off x="5432739" y="4287138"/>
+            <a:off x="5432739" y="4177410"/>
             <a:ext cx="713232" cy="256032"/>
           </a:xfrm>
           <a:prstGeom prst="rect">
@@ -10262,7 +10262,7 @@
         </p:nvSpPr>
         <p:spPr>
           <a:xfrm>
-            <a:off x="566928" y="4744338"/>
+            <a:off x="566928" y="4634611"/>
             <a:ext cx="1875790" cy="256032"/>
           </a:xfrm>
           <a:prstGeom prst="rect">
@@ -10303,7 +10303,7 @@
         </p:nvSpPr>
         <p:spPr>
           <a:xfrm>
-            <a:off x="2589022" y="4780914"/>
+            <a:off x="2589022" y="4671187"/>
             <a:ext cx="2733989" cy="182880"/>
           </a:xfrm>
           <a:prstGeom prst="roundRect">
@@ -10349,7 +10349,7 @@
         </p:nvSpPr>
         <p:spPr>
           <a:xfrm>
-            <a:off x="2589022" y="4780914"/>
+            <a:off x="2589022" y="4671187"/>
             <a:ext cx="2628835" cy="182880"/>
           </a:xfrm>
           <a:prstGeom prst="roundRect">
@@ -10395,7 +10395,7 @@
         </p:nvSpPr>
         <p:spPr>
           <a:xfrm>
-            <a:off x="5432739" y="4744338"/>
+            <a:off x="5432739" y="4634611"/>
             <a:ext cx="713232" cy="256032"/>
           </a:xfrm>
           <a:prstGeom prst="rect">
@@ -10479,7 +10479,7 @@
         </p:nvGraphicFramePr>
         <p:xfrm>
           <a:off x="6475155" y="1771142"/>
-          <a:ext cx="5149886" cy="4410201"/>
+          <a:ext cx="5149886" cy="4190745"/>
         </p:xfrm>
         <a:graphic>
           <a:graphicData uri="http://schemas.openxmlformats.org/drawingml/2006/chart">
@@ -10495,7 +10495,7 @@
         </p:nvSpPr>
         <p:spPr>
           <a:xfrm>
-            <a:off x="566928" y="6327648"/>
+            <a:off x="566928" y="6089904"/>
             <a:ext cx="11058113" cy="219456"/>
           </a:xfrm>
           <a:prstGeom prst="rect">
@@ -10536,7 +10536,7 @@
         </p:nvSpPr>
         <p:spPr>
           <a:xfrm>
-            <a:off x="10710641" y="6327648"/>
+            <a:off x="10710641" y="6089904"/>
             <a:ext cx="914400" cy="219456"/>
           </a:xfrm>
           <a:prstGeom prst="rect">
@@ -10603,7 +10603,7 @@
         </p:nvSpPr>
         <p:spPr>
           <a:xfrm>
-            <a:off x="786384" y="1910333"/>
+            <a:off x="786384" y="1543110"/>
             <a:ext cx="2194560" cy="842010"/>
           </a:xfrm>
           <a:prstGeom prst="rect">
@@ -10644,7 +10644,7 @@
         </p:nvSpPr>
         <p:spPr>
           <a:xfrm>
-            <a:off x="786384" y="2880360"/>
+            <a:off x="786384" y="2513136"/>
             <a:ext cx="10619201" cy="509523"/>
           </a:xfrm>
           <a:prstGeom prst="rect">
@@ -10685,7 +10685,7 @@
         </p:nvSpPr>
         <p:spPr>
           <a:xfrm>
-            <a:off x="786384" y="3554476"/>
+            <a:off x="786384" y="3187252"/>
             <a:ext cx="8282977" cy="548640"/>
           </a:xfrm>
           <a:prstGeom prst="rect">
@@ -10890,7 +10890,7 @@
         </p:nvSpPr>
         <p:spPr>
           <a:xfrm>
-            <a:off x="10710641" y="6327648"/>
+            <a:off x="10710641" y="6089904"/>
             <a:ext cx="914400" cy="219456"/>
           </a:xfrm>
           <a:prstGeom prst="rect">
@@ -11981,8 +11981,8 @@
         </p:nvSpPr>
         <p:spPr>
           <a:xfrm>
-            <a:off x="566928" y="3985442"/>
-            <a:ext cx="3539733" cy="2195901"/>
+            <a:off x="566928" y="3871325"/>
+            <a:ext cx="3539733" cy="2090562"/>
           </a:xfrm>
           <a:prstGeom prst="roundRect">
             <a:avLst>
@@ -12027,7 +12027,7 @@
         </p:nvSpPr>
         <p:spPr>
           <a:xfrm>
-            <a:off x="768096" y="4446869"/>
+            <a:off x="768096" y="4280082"/>
             <a:ext cx="420624" cy="420624"/>
           </a:xfrm>
           <a:prstGeom prst="ellipse">
@@ -12071,7 +12071,7 @@
         </p:nvSpPr>
         <p:spPr>
           <a:xfrm>
-            <a:off x="768096" y="4465157"/>
+            <a:off x="768096" y="4298370"/>
             <a:ext cx="420624" cy="384048"/>
           </a:xfrm>
           <a:prstGeom prst="rect">
@@ -12112,7 +12112,7 @@
         </p:nvSpPr>
         <p:spPr>
           <a:xfrm>
-            <a:off x="768096" y="4995509"/>
+            <a:off x="768096" y="4828722"/>
             <a:ext cx="3137397" cy="251968"/>
           </a:xfrm>
           <a:prstGeom prst="rect">
@@ -12153,7 +12153,7 @@
         </p:nvSpPr>
         <p:spPr>
           <a:xfrm>
-            <a:off x="768096" y="5311485"/>
+            <a:off x="768096" y="5144698"/>
             <a:ext cx="3137397" cy="408432"/>
           </a:xfrm>
           <a:prstGeom prst="rect">
@@ -12194,8 +12194,8 @@
         </p:nvSpPr>
         <p:spPr>
           <a:xfrm>
-            <a:off x="4326117" y="3985442"/>
-            <a:ext cx="3539733" cy="2195901"/>
+            <a:off x="4326117" y="3871325"/>
+            <a:ext cx="3539733" cy="2090562"/>
           </a:xfrm>
           <a:prstGeom prst="roundRect">
             <a:avLst>
@@ -12240,7 +12240,7 @@
         </p:nvSpPr>
         <p:spPr>
           <a:xfrm>
-            <a:off x="4527285" y="4446869"/>
+            <a:off x="4527285" y="4280082"/>
             <a:ext cx="420624" cy="420624"/>
           </a:xfrm>
           <a:prstGeom prst="ellipse">
@@ -12284,7 +12284,7 @@
         </p:nvSpPr>
         <p:spPr>
           <a:xfrm>
-            <a:off x="4527285" y="4465157"/>
+            <a:off x="4527285" y="4298370"/>
             <a:ext cx="420624" cy="384048"/>
           </a:xfrm>
           <a:prstGeom prst="rect">
@@ -12325,7 +12325,7 @@
         </p:nvSpPr>
         <p:spPr>
           <a:xfrm>
-            <a:off x="4527285" y="4995509"/>
+            <a:off x="4527285" y="4828722"/>
             <a:ext cx="3137397" cy="251968"/>
           </a:xfrm>
           <a:prstGeom prst="rect">
@@ -12366,7 +12366,7 @@
         </p:nvSpPr>
         <p:spPr>
           <a:xfrm>
-            <a:off x="4527285" y="5311485"/>
+            <a:off x="4527285" y="5144698"/>
             <a:ext cx="3137397" cy="408432"/>
           </a:xfrm>
           <a:prstGeom prst="rect">
@@ -12407,8 +12407,8 @@
         </p:nvSpPr>
         <p:spPr>
           <a:xfrm>
-            <a:off x="8085307" y="3985442"/>
-            <a:ext cx="3539733" cy="2195901"/>
+            <a:off x="8085307" y="3871325"/>
+            <a:ext cx="3539733" cy="2090562"/>
           </a:xfrm>
           <a:prstGeom prst="roundRect">
             <a:avLst>
@@ -12453,7 +12453,7 @@
         </p:nvSpPr>
         <p:spPr>
           <a:xfrm>
-            <a:off x="8286475" y="4446869"/>
+            <a:off x="8286475" y="4280082"/>
             <a:ext cx="420624" cy="420624"/>
           </a:xfrm>
           <a:prstGeom prst="ellipse">
@@ -12497,7 +12497,7 @@
         </p:nvSpPr>
         <p:spPr>
           <a:xfrm>
-            <a:off x="8286475" y="4465157"/>
+            <a:off x="8286475" y="4298370"/>
             <a:ext cx="420624" cy="384048"/>
           </a:xfrm>
           <a:prstGeom prst="rect">
@@ -12538,7 +12538,7 @@
         </p:nvSpPr>
         <p:spPr>
           <a:xfrm>
-            <a:off x="8286475" y="4995509"/>
+            <a:off x="8286475" y="4828722"/>
             <a:ext cx="3137397" cy="251968"/>
           </a:xfrm>
           <a:prstGeom prst="rect">
@@ -12579,7 +12579,7 @@
         </p:nvSpPr>
         <p:spPr>
           <a:xfrm>
-            <a:off x="8286475" y="5311485"/>
+            <a:off x="8286475" y="5144698"/>
             <a:ext cx="3137397" cy="408432"/>
           </a:xfrm>
           <a:prstGeom prst="rect">
@@ -12620,7 +12620,7 @@
         </p:nvSpPr>
         <p:spPr>
           <a:xfrm>
-            <a:off x="566928" y="6327648"/>
+            <a:off x="566928" y="6089904"/>
             <a:ext cx="11058113" cy="219456"/>
           </a:xfrm>
           <a:prstGeom prst="rect">
@@ -12661,7 +12661,7 @@
         </p:nvSpPr>
         <p:spPr>
           <a:xfrm>
-            <a:off x="10710641" y="6327648"/>
+            <a:off x="10710641" y="6089904"/>
             <a:ext cx="914400" cy="219456"/>
           </a:xfrm>
           <a:prstGeom prst="rect">
@@ -12728,7 +12728,7 @@
         </p:nvSpPr>
         <p:spPr>
           <a:xfrm>
-            <a:off x="786384" y="1910333"/>
+            <a:off x="786384" y="1543110"/>
             <a:ext cx="2194560" cy="842010"/>
           </a:xfrm>
           <a:prstGeom prst="rect">
@@ -12769,7 +12769,7 @@
         </p:nvSpPr>
         <p:spPr>
           <a:xfrm>
-            <a:off x="786384" y="2880360"/>
+            <a:off x="786384" y="2513136"/>
             <a:ext cx="10619201" cy="509523"/>
           </a:xfrm>
           <a:prstGeom prst="rect">
@@ -12810,7 +12810,7 @@
         </p:nvSpPr>
         <p:spPr>
           <a:xfrm>
-            <a:off x="786384" y="3554476"/>
+            <a:off x="786384" y="3187252"/>
             <a:ext cx="8282977" cy="548640"/>
           </a:xfrm>
           <a:prstGeom prst="rect">
@@ -13015,7 +13015,7 @@
         </p:nvSpPr>
         <p:spPr>
           <a:xfrm>
-            <a:off x="10710641" y="6327648"/>
+            <a:off x="10710641" y="6089904"/>
             <a:ext cx="914400" cy="219456"/>
           </a:xfrm>
           <a:prstGeom prst="rect">
@@ -13166,7 +13166,7 @@
         </p:nvGraphicFramePr>
         <p:xfrm>
           <a:off x="566928" y="1368806"/>
-          <a:ext cx="11058113" cy="2516136"/>
+          <a:ext cx="11058113" cy="2395435"/>
         </p:xfrm>
         <a:graphic>
           <a:graphicData uri="http://schemas.openxmlformats.org/drawingml/2006/chart">
@@ -13182,8 +13182,8 @@
         </p:nvSpPr>
         <p:spPr>
           <a:xfrm>
-            <a:off x="566928" y="4122686"/>
-            <a:ext cx="5419328" cy="2058657"/>
+            <a:off x="566928" y="4001985"/>
+            <a:ext cx="5419328" cy="1959902"/>
           </a:xfrm>
           <a:prstGeom prst="roundRect">
             <a:avLst>
@@ -13228,7 +13228,7 @@
         </p:nvSpPr>
         <p:spPr>
           <a:xfrm>
-            <a:off x="566928" y="4122686"/>
+            <a:off x="566928" y="4001985"/>
             <a:ext cx="5419328" cy="402336"/>
           </a:xfrm>
           <a:prstGeom prst="roundRect">
@@ -13274,7 +13274,7 @@
         </p:nvSpPr>
         <p:spPr>
           <a:xfrm>
-            <a:off x="566928" y="4433582"/>
+            <a:off x="566928" y="4312881"/>
             <a:ext cx="5419328" cy="91440"/>
           </a:xfrm>
           <a:prstGeom prst="rect">
@@ -13318,7 +13318,7 @@
         </p:nvSpPr>
         <p:spPr>
           <a:xfrm>
-            <a:off x="749808" y="4122686"/>
+            <a:off x="749808" y="4001985"/>
             <a:ext cx="5053568" cy="402336"/>
           </a:xfrm>
           <a:prstGeom prst="rect">
@@ -13359,7 +13359,7 @@
         </p:nvSpPr>
         <p:spPr>
           <a:xfrm>
-            <a:off x="749808" y="4756670"/>
+            <a:off x="749808" y="4635969"/>
             <a:ext cx="60452" cy="60452"/>
           </a:xfrm>
           <a:prstGeom prst="ellipse">
@@ -13403,7 +13403,7 @@
         </p:nvSpPr>
         <p:spPr>
           <a:xfrm>
-            <a:off x="938276" y="4671326"/>
+            <a:off x="938276" y="4550625"/>
             <a:ext cx="4865100" cy="231140"/>
           </a:xfrm>
           <a:prstGeom prst="rect">
@@ -13444,7 +13444,7 @@
         </p:nvSpPr>
         <p:spPr>
           <a:xfrm>
-            <a:off x="749808" y="5170690"/>
+            <a:off x="749808" y="5049989"/>
             <a:ext cx="60452" cy="60452"/>
           </a:xfrm>
           <a:prstGeom prst="ellipse">
@@ -13488,7 +13488,7 @@
         </p:nvSpPr>
         <p:spPr>
           <a:xfrm>
-            <a:off x="938276" y="5085346"/>
+            <a:off x="938276" y="4964645"/>
             <a:ext cx="4865100" cy="231140"/>
           </a:xfrm>
           <a:prstGeom prst="rect">
@@ -13529,7 +13529,7 @@
         </p:nvSpPr>
         <p:spPr>
           <a:xfrm>
-            <a:off x="749808" y="5584710"/>
+            <a:off x="749808" y="5464009"/>
             <a:ext cx="60452" cy="60452"/>
           </a:xfrm>
           <a:prstGeom prst="ellipse">
@@ -13573,7 +13573,7 @@
         </p:nvSpPr>
         <p:spPr>
           <a:xfrm>
-            <a:off x="938276" y="5499366"/>
+            <a:off x="938276" y="5378665"/>
             <a:ext cx="4865100" cy="231140"/>
           </a:xfrm>
           <a:prstGeom prst="rect">
@@ -13614,7 +13614,7 @@
         </p:nvSpPr>
         <p:spPr>
           <a:xfrm>
-            <a:off x="749808" y="5870448"/>
+            <a:off x="749808" y="5650992"/>
             <a:ext cx="5053568" cy="237744"/>
           </a:xfrm>
           <a:prstGeom prst="rect">
@@ -13655,8 +13655,8 @@
         </p:nvSpPr>
         <p:spPr>
           <a:xfrm>
-            <a:off x="6205712" y="4122686"/>
-            <a:ext cx="5419328" cy="2058657"/>
+            <a:off x="6205712" y="4001985"/>
+            <a:ext cx="5419328" cy="1959902"/>
           </a:xfrm>
           <a:prstGeom prst="roundRect">
             <a:avLst>
@@ -13701,7 +13701,7 @@
         </p:nvSpPr>
         <p:spPr>
           <a:xfrm>
-            <a:off x="6205712" y="4122686"/>
+            <a:off x="6205712" y="4001985"/>
             <a:ext cx="5419328" cy="402336"/>
           </a:xfrm>
           <a:prstGeom prst="roundRect">
@@ -13747,7 +13747,7 @@
         </p:nvSpPr>
         <p:spPr>
           <a:xfrm>
-            <a:off x="6205712" y="4433582"/>
+            <a:off x="6205712" y="4312881"/>
             <a:ext cx="5419328" cy="91440"/>
           </a:xfrm>
           <a:prstGeom prst="rect">
@@ -13791,7 +13791,7 @@
         </p:nvSpPr>
         <p:spPr>
           <a:xfrm>
-            <a:off x="6388592" y="4122686"/>
+            <a:off x="6388592" y="4001985"/>
             <a:ext cx="5053568" cy="402336"/>
           </a:xfrm>
           <a:prstGeom prst="rect">
@@ -13832,7 +13832,7 @@
         </p:nvSpPr>
         <p:spPr>
           <a:xfrm>
-            <a:off x="6388592" y="4756670"/>
+            <a:off x="6388592" y="4635969"/>
             <a:ext cx="60452" cy="60452"/>
           </a:xfrm>
           <a:prstGeom prst="ellipse">
@@ -13876,7 +13876,7 @@
         </p:nvSpPr>
         <p:spPr>
           <a:xfrm>
-            <a:off x="6577060" y="4671326"/>
+            <a:off x="6577060" y="4550625"/>
             <a:ext cx="4865100" cy="231140"/>
           </a:xfrm>
           <a:prstGeom prst="rect">
@@ -13917,7 +13917,7 @@
         </p:nvSpPr>
         <p:spPr>
           <a:xfrm>
-            <a:off x="6388592" y="5170690"/>
+            <a:off x="6388592" y="5049989"/>
             <a:ext cx="60452" cy="60452"/>
           </a:xfrm>
           <a:prstGeom prst="ellipse">
@@ -13961,7 +13961,7 @@
         </p:nvSpPr>
         <p:spPr>
           <a:xfrm>
-            <a:off x="6577060" y="5085346"/>
+            <a:off x="6577060" y="4964645"/>
             <a:ext cx="4865100" cy="231140"/>
           </a:xfrm>
           <a:prstGeom prst="rect">
@@ -14002,7 +14002,7 @@
         </p:nvSpPr>
         <p:spPr>
           <a:xfrm>
-            <a:off x="6388592" y="5584710"/>
+            <a:off x="6388592" y="5464009"/>
             <a:ext cx="60452" cy="60452"/>
           </a:xfrm>
           <a:prstGeom prst="ellipse">
@@ -14046,7 +14046,7 @@
         </p:nvSpPr>
         <p:spPr>
           <a:xfrm>
-            <a:off x="6577060" y="5499366"/>
+            <a:off x="6577060" y="5378665"/>
             <a:ext cx="4865100" cy="231140"/>
           </a:xfrm>
           <a:prstGeom prst="rect">
@@ -14087,7 +14087,7 @@
         </p:nvSpPr>
         <p:spPr>
           <a:xfrm>
-            <a:off x="6388592" y="5870448"/>
+            <a:off x="6388592" y="5650992"/>
             <a:ext cx="5053568" cy="237744"/>
           </a:xfrm>
           <a:prstGeom prst="rect">
@@ -14128,7 +14128,7 @@
         </p:nvSpPr>
         <p:spPr>
           <a:xfrm>
-            <a:off x="566928" y="6327648"/>
+            <a:off x="566928" y="6089904"/>
             <a:ext cx="11058113" cy="219456"/>
           </a:xfrm>
           <a:prstGeom prst="rect">
@@ -14169,7 +14169,7 @@
         </p:nvSpPr>
         <p:spPr>
           <a:xfrm>
-            <a:off x="10710641" y="6327648"/>
+            <a:off x="10710641" y="6089904"/>
             <a:ext cx="914400" cy="219456"/>
           </a:xfrm>
           <a:prstGeom prst="rect">
